--- a/pptx-asset-library/decks/05_timeline/TML_roadmap_v1.pptx
+++ b/pptx-asset-library/decks/05_timeline/TML_roadmap_v1.pptx
@@ -7288,619 +7288,604 @@
           </a:p>
         </p:txBody>
       </p:sp>
-      <p:grpSp>
-        <p:nvGrpSpPr>
-          <p:cNvPr id="7" name="asset:TML-008"/>
-          <p:cNvGrpSpPr/>
+      <p:sp>
+        <p:nvSpPr>
+          <p:cNvPr id="3" name="TextBox 2"/>
+          <p:cNvSpPr txBox="1"/>
           <p:nvPr/>
-        </p:nvGrpSpPr>
-        <p:grpSpPr>
+        </p:nvSpPr>
+        <p:spPr>
           <a:xfrm>
             <a:off x="502920" y="475488"/>
-            <a:ext cx="11155680" cy="5577840"/>
-            <a:chOff x="502920" y="475488"/>
-            <a:chExt cx="11155680" cy="5577840"/>
+            <a:ext cx="11155680" cy="457200"/>
           </a:xfrm>
-        </p:grpSpPr>
-        <p:sp>
-          <p:nvSpPr>
-            <p:cNvPr id="3" name="TextBox 2"/>
-            <p:cNvSpPr txBox="1"/>
-            <p:nvPr/>
-          </p:nvSpPr>
-          <p:spPr>
-            <a:xfrm>
-              <a:off x="502920" y="475488"/>
-              <a:ext cx="11155680" cy="457200"/>
-            </a:xfrm>
-            <a:prstGeom prst="rect">
-              <a:avLst/>
-            </a:prstGeom>
-            <a:noFill/>
-          </p:spPr>
-          <p:txBody>
-            <a:bodyPr wrap="square" anchor="ctr" lIns="38100" rIns="38100" tIns="25400" bIns="25400">
-              <a:spAutoFit/>
-            </a:bodyPr>
-            <a:lstStyle/>
-            <a:p>
-              <a:pPr algn="l"/>
-              <a:r>
-                <a:rPr sz="1800" b="1">
-                  <a:solidFill>
-                    <a:srgbClr val="1F3864"/>
-                  </a:solidFill>
-                  <a:latin typeface="Pretendard"/>
-                  <a:ea typeface="Pretendard"/>
-                  <a:cs typeface="Pretendard"/>
-                </a:rPr>
-                <a:t>추진일정 요약 (단계·활동·산출물)</a:t>
-              </a:r>
-            </a:p>
-          </p:txBody>
-        </p:sp>
-        <p:sp>
-          <p:nvSpPr>
-            <p:cNvPr id="4" name="TextBox 3"/>
-            <p:cNvSpPr txBox="1"/>
-            <p:nvPr/>
-          </p:nvSpPr>
-          <p:spPr>
-            <a:xfrm>
-              <a:off x="502920" y="932688"/>
-              <a:ext cx="11155680" cy="292608"/>
-            </a:xfrm>
-            <a:prstGeom prst="rect">
-              <a:avLst/>
-            </a:prstGeom>
-            <a:noFill/>
-          </p:spPr>
-          <p:txBody>
-            <a:bodyPr wrap="square" anchor="ctr" lIns="38100" rIns="38100" tIns="25400" bIns="25400">
-              <a:spAutoFit/>
-            </a:bodyPr>
-            <a:lstStyle/>
-            <a:p>
-              <a:pPr algn="l"/>
-              <a:r>
-                <a:rPr sz="1100" b="0">
-                  <a:solidFill>
-                    <a:srgbClr val="595959"/>
-                  </a:solidFill>
-                  <a:latin typeface="Pretendard"/>
-                  <a:ea typeface="Pretendard"/>
-                  <a:cs typeface="Pretendard"/>
-                </a:rPr>
-                <a:t>추진 단계별 주요 활동과 산출물을 3열로 매핑</a:t>
-              </a:r>
-            </a:p>
-          </p:txBody>
-        </p:sp>
-        <p:graphicFrame>
-          <p:nvGraphicFramePr>
-            <p:cNvPr id="5" name="TML-008_bg"/>
-            <p:cNvGraphicFramePr>
-              <a:graphicFrameLocks noGrp="1"/>
-            </p:cNvGraphicFramePr>
-            <p:nvPr/>
-          </p:nvGraphicFramePr>
-          <p:xfrm>
+          <a:prstGeom prst="rect">
+            <a:avLst/>
+          </a:prstGeom>
+          <a:noFill/>
+        </p:spPr>
+        <p:txBody>
+          <a:bodyPr wrap="square" anchor="ctr" lIns="38100" rIns="38100" tIns="25400" bIns="25400">
+            <a:spAutoFit/>
+          </a:bodyPr>
+          <a:lstStyle/>
+          <a:p>
+            <a:pPr algn="l"/>
+            <a:r>
+              <a:rPr sz="1800" b="1">
+                <a:solidFill>
+                  <a:srgbClr val="1F3864"/>
+                </a:solidFill>
+                <a:latin typeface="Pretendard"/>
+                <a:ea typeface="Pretendard"/>
+                <a:cs typeface="Pretendard"/>
+              </a:rPr>
+              <a:t>추진일정 요약 (단계·활동·산출물)</a:t>
+            </a:r>
+          </a:p>
+        </p:txBody>
+      </p:sp>
+      <p:sp>
+        <p:nvSpPr>
+          <p:cNvPr id="4" name="TextBox 3"/>
+          <p:cNvSpPr txBox="1"/>
+          <p:nvPr/>
+        </p:nvSpPr>
+        <p:spPr>
+          <a:xfrm>
+            <a:off x="502920" y="932688"/>
+            <a:ext cx="11155680" cy="292608"/>
+          </a:xfrm>
+          <a:prstGeom prst="rect">
+            <a:avLst/>
+          </a:prstGeom>
+          <a:noFill/>
+        </p:spPr>
+        <p:txBody>
+          <a:bodyPr wrap="square" anchor="ctr" lIns="38100" rIns="38100" tIns="25400" bIns="25400">
+            <a:spAutoFit/>
+          </a:bodyPr>
+          <a:lstStyle/>
+          <a:p>
+            <a:pPr algn="l"/>
+            <a:r>
+              <a:rPr sz="1100" b="0">
+                <a:solidFill>
+                  <a:srgbClr val="595959"/>
+                </a:solidFill>
+                <a:latin typeface="Pretendard"/>
+                <a:ea typeface="Pretendard"/>
+                <a:cs typeface="Pretendard"/>
+              </a:rPr>
+              <a:t>추진 단계별 주요 활동과 산출물을 3열로 매핑</a:t>
+            </a:r>
+          </a:p>
+        </p:txBody>
+      </p:sp>
+      <p:graphicFrame>
+        <p:nvGraphicFramePr>
+          <p:cNvPr id="5" name="asset:TML-008"/>
+          <p:cNvGraphicFramePr>
+            <a:graphicFrameLocks noGrp="1"/>
+          </p:cNvGraphicFramePr>
+          <p:nvPr/>
+        </p:nvGraphicFramePr>
+        <p:xfrm>
+          <a:off x="1005840" y="1554480"/>
+          <a:ext cx="10149840" cy="4498848"/>
+        </p:xfrm>
+        <a:graphic>
+          <a:graphicData uri="http://schemas.openxmlformats.org/drawingml/2006/table">
+            <a:tbl>
+              <a:tblPr>
+                <a:tableStyleId>{5C22544A-7EE6-4342-B048-85BDC9FD1C3A}</a:tableStyleId>
+              </a:tblPr>
+              <a:tblGrid>
+                <a:gridCol w="2651760"/>
+                <a:gridCol w="4663440"/>
+                <a:gridCol w="2834640"/>
+              </a:tblGrid>
+              <a:tr h="749808">
+                <a:tc>
+                  <a:txBody>
+                    <a:bodyPr wrap="square"/>
+                    <a:lstStyle/>
+                    <a:p>
+                      <a:pPr algn="ctr"/>
+                      <a:r>
+                        <a:rPr sz="1200" b="1">
+                          <a:solidFill>
+                            <a:srgbClr val="FFFFFF"/>
+                          </a:solidFill>
+                          <a:latin typeface="Pretendard"/>
+                          <a:ea typeface="Pretendard"/>
+                          <a:cs typeface="Pretendard"/>
+                        </a:rPr>
+                        <a:t>추진 단계</a:t>
+                      </a:r>
+                    </a:p>
+                  </a:txBody>
+                  <a:tcPr anchor="ctr" marL="76200" marR="76200" marT="38100" marB="38100">
+                    <a:solidFill>
+                      <a:srgbClr val="1F3864"/>
+                    </a:solidFill>
+                  </a:tcPr>
+                </a:tc>
+                <a:tc>
+                  <a:txBody>
+                    <a:bodyPr wrap="square"/>
+                    <a:lstStyle/>
+                    <a:p>
+                      <a:pPr algn="ctr"/>
+                      <a:r>
+                        <a:rPr sz="1200" b="1">
+                          <a:solidFill>
+                            <a:srgbClr val="FFFFFF"/>
+                          </a:solidFill>
+                          <a:latin typeface="Pretendard"/>
+                          <a:ea typeface="Pretendard"/>
+                          <a:cs typeface="Pretendard"/>
+                        </a:rPr>
+                        <a:t>주요 활동</a:t>
+                      </a:r>
+                    </a:p>
+                  </a:txBody>
+                  <a:tcPr anchor="ctr" marL="76200" marR="76200" marT="38100" marB="38100">
+                    <a:solidFill>
+                      <a:srgbClr val="1F3864"/>
+                    </a:solidFill>
+                  </a:tcPr>
+                </a:tc>
+                <a:tc>
+                  <a:txBody>
+                    <a:bodyPr wrap="square"/>
+                    <a:lstStyle/>
+                    <a:p>
+                      <a:pPr algn="ctr"/>
+                      <a:r>
+                        <a:rPr sz="1200" b="1">
+                          <a:solidFill>
+                            <a:srgbClr val="FFFFFF"/>
+                          </a:solidFill>
+                          <a:latin typeface="Pretendard"/>
+                          <a:ea typeface="Pretendard"/>
+                          <a:cs typeface="Pretendard"/>
+                        </a:rPr>
+                        <a:t>산출물</a:t>
+                      </a:r>
+                    </a:p>
+                  </a:txBody>
+                  <a:tcPr anchor="ctr" marL="76200" marR="76200" marT="38100" marB="38100">
+                    <a:solidFill>
+                      <a:srgbClr val="1F3864"/>
+                    </a:solidFill>
+                  </a:tcPr>
+                </a:tc>
+              </a:tr>
+              <a:tr h="749808">
+                <a:tc>
+                  <a:txBody>
+                    <a:bodyPr wrap="square"/>
+                    <a:lstStyle/>
+                    <a:p>
+                      <a:pPr algn="ctr"/>
+                      <a:r>
+                        <a:rPr sz="1100" b="1">
+                          <a:solidFill>
+                            <a:srgbClr val="2E75D6"/>
+                          </a:solidFill>
+                          <a:latin typeface="Pretendard"/>
+                          <a:ea typeface="Pretendard"/>
+                          <a:cs typeface="Pretendard"/>
+                        </a:rPr>
+                        <a:t>1단계 착수·분석</a:t>
+                      </a:r>
+                    </a:p>
+                  </a:txBody>
+                  <a:tcPr anchor="ctr" marL="76200" marR="76200" marT="38100" marB="38100">
+                    <a:solidFill>
+                      <a:srgbClr val="FFFFFF"/>
+                    </a:solidFill>
+                  </a:tcPr>
+                </a:tc>
+                <a:tc>
+                  <a:txBody>
+                    <a:bodyPr wrap="square"/>
+                    <a:lstStyle/>
+                    <a:p>
+                      <a:pPr algn="l"/>
+                      <a:r>
+                        <a:rPr sz="1000" b="0">
+                          <a:solidFill>
+                            <a:srgbClr val="222222"/>
+                          </a:solidFill>
+                          <a:latin typeface="Pretendard"/>
+                          <a:ea typeface="Pretendard"/>
+                          <a:cs typeface="Pretendard"/>
+                        </a:rPr>
+                        <a:t>착수보고 · 현황 분석 · 요구사항 정의</a:t>
+                      </a:r>
+                    </a:p>
+                  </a:txBody>
+                  <a:tcPr anchor="ctr" marL="76200" marR="76200" marT="38100" marB="38100">
+                    <a:solidFill>
+                      <a:srgbClr val="FFFFFF"/>
+                    </a:solidFill>
+                  </a:tcPr>
+                </a:tc>
+                <a:tc>
+                  <a:txBody>
+                    <a:bodyPr wrap="square"/>
+                    <a:lstStyle/>
+                    <a:p>
+                      <a:pPr algn="ctr"/>
+                      <a:r>
+                        <a:rPr sz="1000" b="1">
+                          <a:solidFill>
+                            <a:srgbClr val="595959"/>
+                          </a:solidFill>
+                          <a:latin typeface="Pretendard"/>
+                          <a:ea typeface="Pretendard"/>
+                          <a:cs typeface="Pretendard"/>
+                        </a:rPr>
+                        <a:t>요구사항 정의서</a:t>
+                      </a:r>
+                    </a:p>
+                  </a:txBody>
+                  <a:tcPr anchor="ctr" marL="76200" marR="76200" marT="38100" marB="38100">
+                    <a:solidFill>
+                      <a:srgbClr val="FFFFFF"/>
+                    </a:solidFill>
+                  </a:tcPr>
+                </a:tc>
+              </a:tr>
+              <a:tr h="749808">
+                <a:tc>
+                  <a:txBody>
+                    <a:bodyPr wrap="square"/>
+                    <a:lstStyle/>
+                    <a:p>
+                      <a:pPr algn="ctr"/>
+                      <a:r>
+                        <a:rPr sz="1100" b="1">
+                          <a:solidFill>
+                            <a:srgbClr val="1F9E8F"/>
+                          </a:solidFill>
+                          <a:latin typeface="Pretendard"/>
+                          <a:ea typeface="Pretendard"/>
+                          <a:cs typeface="Pretendard"/>
+                        </a:rPr>
+                        <a:t>2단계 설계</a:t>
+                      </a:r>
+                    </a:p>
+                  </a:txBody>
+                  <a:tcPr anchor="ctr" marL="76200" marR="76200" marT="38100" marB="38100">
+                    <a:solidFill>
+                      <a:srgbClr val="F2F2F2"/>
+                    </a:solidFill>
+                  </a:tcPr>
+                </a:tc>
+                <a:tc>
+                  <a:txBody>
+                    <a:bodyPr wrap="square"/>
+                    <a:lstStyle/>
+                    <a:p>
+                      <a:pPr algn="l"/>
+                      <a:r>
+                        <a:rPr sz="1000" b="0">
+                          <a:solidFill>
+                            <a:srgbClr val="222222"/>
+                          </a:solidFill>
+                          <a:latin typeface="Pretendard"/>
+                          <a:ea typeface="Pretendard"/>
+                          <a:cs typeface="Pretendard"/>
+                        </a:rPr>
+                        <a:t>기본·상세 설계 · 화면 정의</a:t>
+                      </a:r>
+                    </a:p>
+                  </a:txBody>
+                  <a:tcPr anchor="ctr" marL="76200" marR="76200" marT="38100" marB="38100">
+                    <a:solidFill>
+                      <a:srgbClr val="F2F2F2"/>
+                    </a:solidFill>
+                  </a:tcPr>
+                </a:tc>
+                <a:tc>
+                  <a:txBody>
+                    <a:bodyPr wrap="square"/>
+                    <a:lstStyle/>
+                    <a:p>
+                      <a:pPr algn="ctr"/>
+                      <a:r>
+                        <a:rPr sz="1000" b="1">
+                          <a:solidFill>
+                            <a:srgbClr val="595959"/>
+                          </a:solidFill>
+                          <a:latin typeface="Pretendard"/>
+                          <a:ea typeface="Pretendard"/>
+                          <a:cs typeface="Pretendard"/>
+                        </a:rPr>
+                        <a:t>설계서 일체</a:t>
+                      </a:r>
+                    </a:p>
+                  </a:txBody>
+                  <a:tcPr anchor="ctr" marL="76200" marR="76200" marT="38100" marB="38100">
+                    <a:solidFill>
+                      <a:srgbClr val="F2F2F2"/>
+                    </a:solidFill>
+                  </a:tcPr>
+                </a:tc>
+              </a:tr>
+              <a:tr h="749808">
+                <a:tc>
+                  <a:txBody>
+                    <a:bodyPr wrap="square"/>
+                    <a:lstStyle/>
+                    <a:p>
+                      <a:pPr algn="ctr"/>
+                      <a:r>
+                        <a:rPr sz="1100" b="1">
+                          <a:solidFill>
+                            <a:srgbClr val="29ABE2"/>
+                          </a:solidFill>
+                          <a:latin typeface="Pretendard"/>
+                          <a:ea typeface="Pretendard"/>
+                          <a:cs typeface="Pretendard"/>
+                        </a:rPr>
+                        <a:t>3단계 구축</a:t>
+                      </a:r>
+                    </a:p>
+                  </a:txBody>
+                  <a:tcPr anchor="ctr" marL="76200" marR="76200" marT="38100" marB="38100">
+                    <a:solidFill>
+                      <a:srgbClr val="FFFFFF"/>
+                    </a:solidFill>
+                  </a:tcPr>
+                </a:tc>
+                <a:tc>
+                  <a:txBody>
+                    <a:bodyPr wrap="square"/>
+                    <a:lstStyle/>
+                    <a:p>
+                      <a:pPr algn="l"/>
+                      <a:r>
+                        <a:rPr sz="1000" b="0">
+                          <a:solidFill>
+                            <a:srgbClr val="222222"/>
+                          </a:solidFill>
+                          <a:latin typeface="Pretendard"/>
+                          <a:ea typeface="Pretendard"/>
+                          <a:cs typeface="Pretendard"/>
+                        </a:rPr>
+                        <a:t>시스템 개발 · 단위 시험 · 중간보고</a:t>
+                      </a:r>
+                    </a:p>
+                  </a:txBody>
+                  <a:tcPr anchor="ctr" marL="76200" marR="76200" marT="38100" marB="38100">
+                    <a:solidFill>
+                      <a:srgbClr val="FFFFFF"/>
+                    </a:solidFill>
+                  </a:tcPr>
+                </a:tc>
+                <a:tc>
+                  <a:txBody>
+                    <a:bodyPr wrap="square"/>
+                    <a:lstStyle/>
+                    <a:p>
+                      <a:pPr algn="ctr"/>
+                      <a:r>
+                        <a:rPr sz="1000" b="1">
+                          <a:solidFill>
+                            <a:srgbClr val="595959"/>
+                          </a:solidFill>
+                          <a:latin typeface="Pretendard"/>
+                          <a:ea typeface="Pretendard"/>
+                          <a:cs typeface="Pretendard"/>
+                        </a:rPr>
+                        <a:t>개발 산출물 · 중간보고서</a:t>
+                      </a:r>
+                    </a:p>
+                  </a:txBody>
+                  <a:tcPr anchor="ctr" marL="76200" marR="76200" marT="38100" marB="38100">
+                    <a:solidFill>
+                      <a:srgbClr val="FFFFFF"/>
+                    </a:solidFill>
+                  </a:tcPr>
+                </a:tc>
+              </a:tr>
+              <a:tr h="749808">
+                <a:tc>
+                  <a:txBody>
+                    <a:bodyPr wrap="square"/>
+                    <a:lstStyle/>
+                    <a:p>
+                      <a:pPr algn="ctr"/>
+                      <a:r>
+                        <a:rPr sz="1100" b="1">
+                          <a:solidFill>
+                            <a:srgbClr val="2A4A7F"/>
+                          </a:solidFill>
+                          <a:latin typeface="Pretendard"/>
+                          <a:ea typeface="Pretendard"/>
+                          <a:cs typeface="Pretendard"/>
+                        </a:rPr>
+                        <a:t>4단계 시험·안정화</a:t>
+                      </a:r>
+                    </a:p>
+                  </a:txBody>
+                  <a:tcPr anchor="ctr" marL="76200" marR="76200" marT="38100" marB="38100">
+                    <a:solidFill>
+                      <a:srgbClr val="F2F2F2"/>
+                    </a:solidFill>
+                  </a:tcPr>
+                </a:tc>
+                <a:tc>
+                  <a:txBody>
+                    <a:bodyPr wrap="square"/>
+                    <a:lstStyle/>
+                    <a:p>
+                      <a:pPr algn="l"/>
+                      <a:r>
+                        <a:rPr sz="1000" b="0">
+                          <a:solidFill>
+                            <a:srgbClr val="222222"/>
+                          </a:solidFill>
+                          <a:latin typeface="Pretendard"/>
+                          <a:ea typeface="Pretendard"/>
+                          <a:cs typeface="Pretendard"/>
+                        </a:rPr>
+                        <a:t>통합 시험 · 안정화 · 이관 교육</a:t>
+                      </a:r>
+                    </a:p>
+                  </a:txBody>
+                  <a:tcPr anchor="ctr" marL="76200" marR="76200" marT="38100" marB="38100">
+                    <a:solidFill>
+                      <a:srgbClr val="F2F2F2"/>
+                    </a:solidFill>
+                  </a:tcPr>
+                </a:tc>
+                <a:tc>
+                  <a:txBody>
+                    <a:bodyPr wrap="square"/>
+                    <a:lstStyle/>
+                    <a:p>
+                      <a:pPr algn="ctr"/>
+                      <a:r>
+                        <a:rPr sz="1000" b="1">
+                          <a:solidFill>
+                            <a:srgbClr val="595959"/>
+                          </a:solidFill>
+                          <a:latin typeface="Pretendard"/>
+                          <a:ea typeface="Pretendard"/>
+                          <a:cs typeface="Pretendard"/>
+                        </a:rPr>
+                        <a:t>시험 결과서 · 안정화 보고</a:t>
+                      </a:r>
+                    </a:p>
+                  </a:txBody>
+                  <a:tcPr anchor="ctr" marL="76200" marR="76200" marT="38100" marB="38100">
+                    <a:solidFill>
+                      <a:srgbClr val="F2F2F2"/>
+                    </a:solidFill>
+                  </a:tcPr>
+                </a:tc>
+              </a:tr>
+              <a:tr h="749808">
+                <a:tc>
+                  <a:txBody>
+                    <a:bodyPr wrap="square"/>
+                    <a:lstStyle/>
+                    <a:p>
+                      <a:pPr algn="ctr"/>
+                      <a:r>
+                        <a:rPr sz="1100" b="1">
+                          <a:solidFill>
+                            <a:srgbClr val="7B2D8E"/>
+                          </a:solidFill>
+                          <a:latin typeface="Pretendard"/>
+                          <a:ea typeface="Pretendard"/>
+                          <a:cs typeface="Pretendard"/>
+                        </a:rPr>
+                        <a:t>5단계 최종납품</a:t>
+                      </a:r>
+                    </a:p>
+                  </a:txBody>
+                  <a:tcPr anchor="ctr" marL="76200" marR="76200" marT="38100" marB="38100">
+                    <a:solidFill>
+                      <a:srgbClr val="FFFFFF"/>
+                    </a:solidFill>
+                  </a:tcPr>
+                </a:tc>
+                <a:tc>
+                  <a:txBody>
+                    <a:bodyPr wrap="square"/>
+                    <a:lstStyle/>
+                    <a:p>
+                      <a:pPr algn="l"/>
+                      <a:r>
+                        <a:rPr sz="1000" b="0">
+                          <a:solidFill>
+                            <a:srgbClr val="222222"/>
+                          </a:solidFill>
+                          <a:latin typeface="Pretendard"/>
+                          <a:ea typeface="Pretendard"/>
+                          <a:cs typeface="Pretendard"/>
+                        </a:rPr>
+                        <a:t>최종 검수 · 완료보고 · 산출물 이관</a:t>
+                      </a:r>
+                    </a:p>
+                  </a:txBody>
+                  <a:tcPr anchor="ctr" marL="76200" marR="76200" marT="38100" marB="38100">
+                    <a:solidFill>
+                      <a:srgbClr val="FFFFFF"/>
+                    </a:solidFill>
+                  </a:tcPr>
+                </a:tc>
+                <a:tc>
+                  <a:txBody>
+                    <a:bodyPr wrap="square"/>
+                    <a:lstStyle/>
+                    <a:p>
+                      <a:pPr algn="ctr"/>
+                      <a:r>
+                        <a:rPr sz="1000" b="1">
+                          <a:solidFill>
+                            <a:srgbClr val="595959"/>
+                          </a:solidFill>
+                          <a:latin typeface="Pretendard"/>
+                          <a:ea typeface="Pretendard"/>
+                          <a:cs typeface="Pretendard"/>
+                        </a:rPr>
+                        <a:t>완료보고서 · 최종산출물</a:t>
+                      </a:r>
+                    </a:p>
+                  </a:txBody>
+                  <a:tcPr anchor="ctr" marL="76200" marR="76200" marT="38100" marB="38100">
+                    <a:solidFill>
+                      <a:srgbClr val="FFFFFF"/>
+                    </a:solidFill>
+                  </a:tcPr>
+                </a:tc>
+              </a:tr>
+            </a:tbl>
+          </a:graphicData>
+        </a:graphic>
+      </p:graphicFrame>
+      <p:cxnSp>
+        <p:nvCxnSpPr>
+          <p:cNvPr id="6" name="Connector 5"/>
+          <p:cNvCxnSpPr/>
+          <p:nvPr/>
+        </p:nvCxnSpPr>
+        <p:spPr>
+          <a:xfrm>
             <a:off x="1005840" y="1554480"/>
-            <a:ext cx="10149840" cy="4498848"/>
-          </p:xfrm>
-          <a:graphic>
-            <a:graphicData uri="http://schemas.openxmlformats.org/drawingml/2006/table">
-              <a:tbl>
-                <a:tblPr>
-                  <a:tableStyleId>{5C22544A-7EE6-4342-B048-85BDC9FD1C3A}</a:tableStyleId>
-                </a:tblPr>
-                <a:tblGrid>
-                  <a:gridCol w="2651760"/>
-                  <a:gridCol w="4663440"/>
-                  <a:gridCol w="2834640"/>
-                </a:tblGrid>
-                <a:tr h="749808">
-                  <a:tc>
-                    <a:txBody>
-                      <a:bodyPr wrap="square"/>
-                      <a:lstStyle/>
-                      <a:p>
-                        <a:pPr algn="ctr"/>
-                        <a:r>
-                          <a:rPr sz="1200" b="1">
-                            <a:solidFill>
-                              <a:srgbClr val="FFFFFF"/>
-                            </a:solidFill>
-                            <a:latin typeface="Pretendard"/>
-                            <a:ea typeface="Pretendard"/>
-                            <a:cs typeface="Pretendard"/>
-                          </a:rPr>
-                          <a:t>추진 단계</a:t>
-                        </a:r>
-                      </a:p>
-                    </a:txBody>
-                    <a:tcPr anchor="ctr" marL="76200" marR="76200" marT="38100" marB="38100">
-                      <a:solidFill>
-                        <a:srgbClr val="1F3864"/>
-                      </a:solidFill>
-                    </a:tcPr>
-                  </a:tc>
-                  <a:tc>
-                    <a:txBody>
-                      <a:bodyPr wrap="square"/>
-                      <a:lstStyle/>
-                      <a:p>
-                        <a:pPr algn="ctr"/>
-                        <a:r>
-                          <a:rPr sz="1200" b="1">
-                            <a:solidFill>
-                              <a:srgbClr val="FFFFFF"/>
-                            </a:solidFill>
-                            <a:latin typeface="Pretendard"/>
-                            <a:ea typeface="Pretendard"/>
-                            <a:cs typeface="Pretendard"/>
-                          </a:rPr>
-                          <a:t>주요 활동</a:t>
-                        </a:r>
-                      </a:p>
-                    </a:txBody>
-                    <a:tcPr anchor="ctr" marL="76200" marR="76200" marT="38100" marB="38100">
-                      <a:solidFill>
-                        <a:srgbClr val="1F3864"/>
-                      </a:solidFill>
-                    </a:tcPr>
-                  </a:tc>
-                  <a:tc>
-                    <a:txBody>
-                      <a:bodyPr wrap="square"/>
-                      <a:lstStyle/>
-                      <a:p>
-                        <a:pPr algn="ctr"/>
-                        <a:r>
-                          <a:rPr sz="1200" b="1">
-                            <a:solidFill>
-                              <a:srgbClr val="FFFFFF"/>
-                            </a:solidFill>
-                            <a:latin typeface="Pretendard"/>
-                            <a:ea typeface="Pretendard"/>
-                            <a:cs typeface="Pretendard"/>
-                          </a:rPr>
-                          <a:t>산출물</a:t>
-                        </a:r>
-                      </a:p>
-                    </a:txBody>
-                    <a:tcPr anchor="ctr" marL="76200" marR="76200" marT="38100" marB="38100">
-                      <a:solidFill>
-                        <a:srgbClr val="1F3864"/>
-                      </a:solidFill>
-                    </a:tcPr>
-                  </a:tc>
-                </a:tr>
-                <a:tr h="749808">
-                  <a:tc>
-                    <a:txBody>
-                      <a:bodyPr wrap="square"/>
-                      <a:lstStyle/>
-                      <a:p>
-                        <a:pPr algn="ctr"/>
-                        <a:r>
-                          <a:rPr sz="1100" b="1">
-                            <a:solidFill>
-                              <a:srgbClr val="2E75D6"/>
-                            </a:solidFill>
-                            <a:latin typeface="Pretendard"/>
-                            <a:ea typeface="Pretendard"/>
-                            <a:cs typeface="Pretendard"/>
-                          </a:rPr>
-                          <a:t>1단계 착수·분석</a:t>
-                        </a:r>
-                      </a:p>
-                    </a:txBody>
-                    <a:tcPr anchor="ctr" marL="76200" marR="76200" marT="38100" marB="38100">
-                      <a:solidFill>
-                        <a:srgbClr val="FFFFFF"/>
-                      </a:solidFill>
-                    </a:tcPr>
-                  </a:tc>
-                  <a:tc>
-                    <a:txBody>
-                      <a:bodyPr wrap="square"/>
-                      <a:lstStyle/>
-                      <a:p>
-                        <a:pPr algn="l"/>
-                        <a:r>
-                          <a:rPr sz="1000" b="0">
-                            <a:solidFill>
-                              <a:srgbClr val="222222"/>
-                            </a:solidFill>
-                            <a:latin typeface="Pretendard"/>
-                            <a:ea typeface="Pretendard"/>
-                            <a:cs typeface="Pretendard"/>
-                          </a:rPr>
-                          <a:t>착수보고 · 현황 분석 · 요구사항 정의</a:t>
-                        </a:r>
-                      </a:p>
-                    </a:txBody>
-                    <a:tcPr anchor="ctr" marL="76200" marR="76200" marT="38100" marB="38100">
-                      <a:solidFill>
-                        <a:srgbClr val="FFFFFF"/>
-                      </a:solidFill>
-                    </a:tcPr>
-                  </a:tc>
-                  <a:tc>
-                    <a:txBody>
-                      <a:bodyPr wrap="square"/>
-                      <a:lstStyle/>
-                      <a:p>
-                        <a:pPr algn="ctr"/>
-                        <a:r>
-                          <a:rPr sz="1000" b="1">
-                            <a:solidFill>
-                              <a:srgbClr val="595959"/>
-                            </a:solidFill>
-                            <a:latin typeface="Pretendard"/>
-                            <a:ea typeface="Pretendard"/>
-                            <a:cs typeface="Pretendard"/>
-                          </a:rPr>
-                          <a:t>요구사항 정의서</a:t>
-                        </a:r>
-                      </a:p>
-                    </a:txBody>
-                    <a:tcPr anchor="ctr" marL="76200" marR="76200" marT="38100" marB="38100">
-                      <a:solidFill>
-                        <a:srgbClr val="FFFFFF"/>
-                      </a:solidFill>
-                    </a:tcPr>
-                  </a:tc>
-                </a:tr>
-                <a:tr h="749808">
-                  <a:tc>
-                    <a:txBody>
-                      <a:bodyPr wrap="square"/>
-                      <a:lstStyle/>
-                      <a:p>
-                        <a:pPr algn="ctr"/>
-                        <a:r>
-                          <a:rPr sz="1100" b="1">
-                            <a:solidFill>
-                              <a:srgbClr val="1F9E8F"/>
-                            </a:solidFill>
-                            <a:latin typeface="Pretendard"/>
-                            <a:ea typeface="Pretendard"/>
-                            <a:cs typeface="Pretendard"/>
-                          </a:rPr>
-                          <a:t>2단계 설계</a:t>
-                        </a:r>
-                      </a:p>
-                    </a:txBody>
-                    <a:tcPr anchor="ctr" marL="76200" marR="76200" marT="38100" marB="38100">
-                      <a:solidFill>
-                        <a:srgbClr val="F2F2F2"/>
-                      </a:solidFill>
-                    </a:tcPr>
-                  </a:tc>
-                  <a:tc>
-                    <a:txBody>
-                      <a:bodyPr wrap="square"/>
-                      <a:lstStyle/>
-                      <a:p>
-                        <a:pPr algn="l"/>
-                        <a:r>
-                          <a:rPr sz="1000" b="0">
-                            <a:solidFill>
-                              <a:srgbClr val="222222"/>
-                            </a:solidFill>
-                            <a:latin typeface="Pretendard"/>
-                            <a:ea typeface="Pretendard"/>
-                            <a:cs typeface="Pretendard"/>
-                          </a:rPr>
-                          <a:t>기본·상세 설계 · 화면 정의</a:t>
-                        </a:r>
-                      </a:p>
-                    </a:txBody>
-                    <a:tcPr anchor="ctr" marL="76200" marR="76200" marT="38100" marB="38100">
-                      <a:solidFill>
-                        <a:srgbClr val="F2F2F2"/>
-                      </a:solidFill>
-                    </a:tcPr>
-                  </a:tc>
-                  <a:tc>
-                    <a:txBody>
-                      <a:bodyPr wrap="square"/>
-                      <a:lstStyle/>
-                      <a:p>
-                        <a:pPr algn="ctr"/>
-                        <a:r>
-                          <a:rPr sz="1000" b="1">
-                            <a:solidFill>
-                              <a:srgbClr val="595959"/>
-                            </a:solidFill>
-                            <a:latin typeface="Pretendard"/>
-                            <a:ea typeface="Pretendard"/>
-                            <a:cs typeface="Pretendard"/>
-                          </a:rPr>
-                          <a:t>설계서 일체</a:t>
-                        </a:r>
-                      </a:p>
-                    </a:txBody>
-                    <a:tcPr anchor="ctr" marL="76200" marR="76200" marT="38100" marB="38100">
-                      <a:solidFill>
-                        <a:srgbClr val="F2F2F2"/>
-                      </a:solidFill>
-                    </a:tcPr>
-                  </a:tc>
-                </a:tr>
-                <a:tr h="749808">
-                  <a:tc>
-                    <a:txBody>
-                      <a:bodyPr wrap="square"/>
-                      <a:lstStyle/>
-                      <a:p>
-                        <a:pPr algn="ctr"/>
-                        <a:r>
-                          <a:rPr sz="1100" b="1">
-                            <a:solidFill>
-                              <a:srgbClr val="29ABE2"/>
-                            </a:solidFill>
-                            <a:latin typeface="Pretendard"/>
-                            <a:ea typeface="Pretendard"/>
-                            <a:cs typeface="Pretendard"/>
-                          </a:rPr>
-                          <a:t>3단계 구축</a:t>
-                        </a:r>
-                      </a:p>
-                    </a:txBody>
-                    <a:tcPr anchor="ctr" marL="76200" marR="76200" marT="38100" marB="38100">
-                      <a:solidFill>
-                        <a:srgbClr val="FFFFFF"/>
-                      </a:solidFill>
-                    </a:tcPr>
-                  </a:tc>
-                  <a:tc>
-                    <a:txBody>
-                      <a:bodyPr wrap="square"/>
-                      <a:lstStyle/>
-                      <a:p>
-                        <a:pPr algn="l"/>
-                        <a:r>
-                          <a:rPr sz="1000" b="0">
-                            <a:solidFill>
-                              <a:srgbClr val="222222"/>
-                            </a:solidFill>
-                            <a:latin typeface="Pretendard"/>
-                            <a:ea typeface="Pretendard"/>
-                            <a:cs typeface="Pretendard"/>
-                          </a:rPr>
-                          <a:t>시스템 개발 · 단위 시험 · 중간보고</a:t>
-                        </a:r>
-                      </a:p>
-                    </a:txBody>
-                    <a:tcPr anchor="ctr" marL="76200" marR="76200" marT="38100" marB="38100">
-                      <a:solidFill>
-                        <a:srgbClr val="FFFFFF"/>
-                      </a:solidFill>
-                    </a:tcPr>
-                  </a:tc>
-                  <a:tc>
-                    <a:txBody>
-                      <a:bodyPr wrap="square"/>
-                      <a:lstStyle/>
-                      <a:p>
-                        <a:pPr algn="ctr"/>
-                        <a:r>
-                          <a:rPr sz="1000" b="1">
-                            <a:solidFill>
-                              <a:srgbClr val="595959"/>
-                            </a:solidFill>
-                            <a:latin typeface="Pretendard"/>
-                            <a:ea typeface="Pretendard"/>
-                            <a:cs typeface="Pretendard"/>
-                          </a:rPr>
-                          <a:t>개발 산출물 · 중간보고서</a:t>
-                        </a:r>
-                      </a:p>
-                    </a:txBody>
-                    <a:tcPr anchor="ctr" marL="76200" marR="76200" marT="38100" marB="38100">
-                      <a:solidFill>
-                        <a:srgbClr val="FFFFFF"/>
-                      </a:solidFill>
-                    </a:tcPr>
-                  </a:tc>
-                </a:tr>
-                <a:tr h="749808">
-                  <a:tc>
-                    <a:txBody>
-                      <a:bodyPr wrap="square"/>
-                      <a:lstStyle/>
-                      <a:p>
-                        <a:pPr algn="ctr"/>
-                        <a:r>
-                          <a:rPr sz="1100" b="1">
-                            <a:solidFill>
-                              <a:srgbClr val="2A4A7F"/>
-                            </a:solidFill>
-                            <a:latin typeface="Pretendard"/>
-                            <a:ea typeface="Pretendard"/>
-                            <a:cs typeface="Pretendard"/>
-                          </a:rPr>
-                          <a:t>4단계 시험·안정화</a:t>
-                        </a:r>
-                      </a:p>
-                    </a:txBody>
-                    <a:tcPr anchor="ctr" marL="76200" marR="76200" marT="38100" marB="38100">
-                      <a:solidFill>
-                        <a:srgbClr val="F2F2F2"/>
-                      </a:solidFill>
-                    </a:tcPr>
-                  </a:tc>
-                  <a:tc>
-                    <a:txBody>
-                      <a:bodyPr wrap="square"/>
-                      <a:lstStyle/>
-                      <a:p>
-                        <a:pPr algn="l"/>
-                        <a:r>
-                          <a:rPr sz="1000" b="0">
-                            <a:solidFill>
-                              <a:srgbClr val="222222"/>
-                            </a:solidFill>
-                            <a:latin typeface="Pretendard"/>
-                            <a:ea typeface="Pretendard"/>
-                            <a:cs typeface="Pretendard"/>
-                          </a:rPr>
-                          <a:t>통합 시험 · 안정화 · 이관 교육</a:t>
-                        </a:r>
-                      </a:p>
-                    </a:txBody>
-                    <a:tcPr anchor="ctr" marL="76200" marR="76200" marT="38100" marB="38100">
-                      <a:solidFill>
-                        <a:srgbClr val="F2F2F2"/>
-                      </a:solidFill>
-                    </a:tcPr>
-                  </a:tc>
-                  <a:tc>
-                    <a:txBody>
-                      <a:bodyPr wrap="square"/>
-                      <a:lstStyle/>
-                      <a:p>
-                        <a:pPr algn="ctr"/>
-                        <a:r>
-                          <a:rPr sz="1000" b="1">
-                            <a:solidFill>
-                              <a:srgbClr val="595959"/>
-                            </a:solidFill>
-                            <a:latin typeface="Pretendard"/>
-                            <a:ea typeface="Pretendard"/>
-                            <a:cs typeface="Pretendard"/>
-                          </a:rPr>
-                          <a:t>시험 결과서 · 안정화 보고</a:t>
-                        </a:r>
-                      </a:p>
-                    </a:txBody>
-                    <a:tcPr anchor="ctr" marL="76200" marR="76200" marT="38100" marB="38100">
-                      <a:solidFill>
-                        <a:srgbClr val="F2F2F2"/>
-                      </a:solidFill>
-                    </a:tcPr>
-                  </a:tc>
-                </a:tr>
-                <a:tr h="749808">
-                  <a:tc>
-                    <a:txBody>
-                      <a:bodyPr wrap="square"/>
-                      <a:lstStyle/>
-                      <a:p>
-                        <a:pPr algn="ctr"/>
-                        <a:r>
-                          <a:rPr sz="1100" b="1">
-                            <a:solidFill>
-                              <a:srgbClr val="7B2D8E"/>
-                            </a:solidFill>
-                            <a:latin typeface="Pretendard"/>
-                            <a:ea typeface="Pretendard"/>
-                            <a:cs typeface="Pretendard"/>
-                          </a:rPr>
-                          <a:t>5단계 최종납품</a:t>
-                        </a:r>
-                      </a:p>
-                    </a:txBody>
-                    <a:tcPr anchor="ctr" marL="76200" marR="76200" marT="38100" marB="38100">
-                      <a:solidFill>
-                        <a:srgbClr val="FFFFFF"/>
-                      </a:solidFill>
-                    </a:tcPr>
-                  </a:tc>
-                  <a:tc>
-                    <a:txBody>
-                      <a:bodyPr wrap="square"/>
-                      <a:lstStyle/>
-                      <a:p>
-                        <a:pPr algn="l"/>
-                        <a:r>
-                          <a:rPr sz="1000" b="0">
-                            <a:solidFill>
-                              <a:srgbClr val="222222"/>
-                            </a:solidFill>
-                            <a:latin typeface="Pretendard"/>
-                            <a:ea typeface="Pretendard"/>
-                            <a:cs typeface="Pretendard"/>
-                          </a:rPr>
-                          <a:t>최종 검수 · 완료보고 · 산출물 이관</a:t>
-                        </a:r>
-                      </a:p>
-                    </a:txBody>
-                    <a:tcPr anchor="ctr" marL="76200" marR="76200" marT="38100" marB="38100">
-                      <a:solidFill>
-                        <a:srgbClr val="FFFFFF"/>
-                      </a:solidFill>
-                    </a:tcPr>
-                  </a:tc>
-                  <a:tc>
-                    <a:txBody>
-                      <a:bodyPr wrap="square"/>
-                      <a:lstStyle/>
-                      <a:p>
-                        <a:pPr algn="ctr"/>
-                        <a:r>
-                          <a:rPr sz="1000" b="1">
-                            <a:solidFill>
-                              <a:srgbClr val="595959"/>
-                            </a:solidFill>
-                            <a:latin typeface="Pretendard"/>
-                            <a:ea typeface="Pretendard"/>
-                            <a:cs typeface="Pretendard"/>
-                          </a:rPr>
-                          <a:t>완료보고서 · 최종산출물</a:t>
-                        </a:r>
-                      </a:p>
-                    </a:txBody>
-                    <a:tcPr anchor="ctr" marL="76200" marR="76200" marT="38100" marB="38100">
-                      <a:solidFill>
-                        <a:srgbClr val="FFFFFF"/>
-                      </a:solidFill>
-                    </a:tcPr>
-                  </a:tc>
-                </a:tr>
-              </a:tbl>
-            </a:graphicData>
-          </a:graphic>
-        </p:graphicFrame>
-        <p:cxnSp>
-          <p:nvCxnSpPr>
-            <p:cNvPr id="6" name="Connector 5"/>
-            <p:cNvCxnSpPr/>
-            <p:nvPr/>
-          </p:nvCxnSpPr>
-          <p:spPr>
-            <a:xfrm>
-              <a:off x="1005840" y="1554480"/>
-              <a:ext cx="0" cy="4498848"/>
-            </a:xfrm>
-            <a:prstGeom prst="line">
-              <a:avLst/>
-            </a:prstGeom>
-            <a:ln w="31750">
-              <a:solidFill>
-                <a:srgbClr val="2E75D6"/>
-              </a:solidFill>
-            </a:ln>
-          </p:spPr>
-          <p:style>
-            <a:lnRef idx="2">
-              <a:schemeClr val="accent1"/>
-            </a:lnRef>
-            <a:fillRef idx="0">
-              <a:schemeClr val="accent1"/>
-            </a:fillRef>
-            <a:effectRef idx="1">
-              <a:schemeClr val="accent1"/>
-            </a:effectRef>
-            <a:fontRef idx="minor">
-              <a:schemeClr val="tx1"/>
-            </a:fontRef>
-          </p:style>
-        </p:cxnSp>
-      </p:grpSp>
+            <a:ext cx="0" cy="4498848"/>
+          </a:xfrm>
+          <a:prstGeom prst="line">
+            <a:avLst/>
+          </a:prstGeom>
+          <a:ln w="31750">
+            <a:solidFill>
+              <a:srgbClr val="2E75D6"/>
+            </a:solidFill>
+          </a:ln>
+        </p:spPr>
+        <p:style>
+          <a:lnRef idx="2">
+            <a:schemeClr val="accent1"/>
+          </a:lnRef>
+          <a:fillRef idx="0">
+            <a:schemeClr val="accent1"/>
+          </a:fillRef>
+          <a:effectRef idx="1">
+            <a:schemeClr val="accent1"/>
+          </a:effectRef>
+          <a:fontRef idx="minor">
+            <a:schemeClr val="tx1"/>
+          </a:fontRef>
+        </p:style>
+      </p:cxnSp>
     </p:spTree>
   </p:cSld>
   <p:clrMapOvr>
